--- a/ppt/ch03-2 鼓舞弦动——丰富的民间器乐-丝竹相和.pptx
+++ b/ppt/ch03-2 鼓舞弦动——丰富的民间器乐-丝竹相和.pptx
@@ -3204,7 +3204,7 @@
       </p:sp>
       <p:pic>
         <p:nvPicPr>
-          <p:cNvPr id="5" name="Picture 4" descr="school-badge-display.png"/>
+          <p:cNvPr id="5" name="Picture 4" descr="school-logo.png"/>
           <p:cNvPicPr>
             <a:picLocks noChangeAspect="1"/>
           </p:cNvPicPr>
@@ -3218,8 +3218,32 @@
         </p:blipFill>
         <p:spPr>
           <a:xfrm>
-            <a:off x="10332720" y="457200"/>
-            <a:ext cx="1371600" cy="182458"/>
+            <a:off x="10515600" y="411480"/>
+            <a:ext cx="1051560" cy="1051560"/>
+          </a:xfrm>
+          <a:prstGeom prst="rect">
+            <a:avLst/>
+          </a:prstGeom>
+        </p:spPr>
+      </p:pic>
+      <p:pic>
+        <p:nvPicPr>
+          <p:cNvPr id="6" name="Picture 5" descr="school-name.png"/>
+          <p:cNvPicPr>
+            <a:picLocks noChangeAspect="1"/>
+          </p:cNvPicPr>
+          <p:nvPr/>
+        </p:nvPicPr>
+        <p:blipFill>
+          <a:blip r:embed="rId3"/>
+          <a:stretch>
+            <a:fillRect/>
+          </a:stretch>
+        </p:blipFill>
+        <p:spPr>
+          <a:xfrm>
+            <a:off x="640080" y="4297680"/>
+            <a:ext cx="2743200" cy="739739"/>
           </a:xfrm>
           <a:prstGeom prst="rect">
             <a:avLst/>
@@ -4213,7 +4237,7 @@
                 </a:solidFill>
                 <a:latin typeface="Microsoft YaHei"/>
               </a:rPr>
-              <a:t>• 吹歌：鼓吹乐中的一类，以吹管乐器为主、辅之打击乐器；因曲目多采民歌或戏曲唱腔，故称"吹歌"（书第35页）。 - When to…</a:t>
+              <a:t>• 吹歌：鼓吹乐中的一类，以吹管乐器为主、辅之打击乐器；因曲目多采民歌或戏曲唱腔，故称"吹歌"（书第35页）。 - 何时使用： 识…</a:t>
             </a:r>
           </a:p>
           <a:p>
@@ -4229,7 +4253,7 @@
                 </a:solidFill>
                 <a:latin typeface="Microsoft YaHei"/>
               </a:rPr>
-              <a:t>• 江南丝竹 / 广东音乐：丝竹类两大乐种，前者轻巧明朗、乐器组合灵活；后者短小精悍、轻快缠绵，高胡扬琴为主奏（书第38页）。 - When to …</a:t>
+              <a:t>• 江南丝竹 / 广东音乐：丝竹类两大乐种，前者轻巧明朗、乐器组合灵活；后者短小精悍、轻快缠绵，高胡扬琴为主奏（书第38页）。 - 何时使用： 区分…</a:t>
             </a:r>
           </a:p>
           <a:p>
